--- a/PowerPoints/RECYCL_IT_final_pitch_6.pptx
+++ b/PowerPoints/RECYCL_IT_final_pitch_6.pptx
@@ -8,8 +8,8 @@
     <p:notesMasterId r:id="rId12"/>
   </p:notesMasterIdLst>
   <p:sldIdLst>
-    <p:sldId id="257" r:id="rId3"/>
-    <p:sldId id="256" r:id="rId2"/>
+    <p:sldId id="257" r:id="rId2"/>
+    <p:sldId id="256" r:id="rId3"/>
     <p:sldId id="258" r:id="rId4"/>
     <p:sldId id="266" r:id="rId5"/>
     <p:sldId id="261" r:id="rId6"/>
@@ -118,8 +118,8 @@
       <p14:sectionLst xmlns:p14="http://schemas.microsoft.com/office/powerpoint/2010/main">
         <p14:section name="Problem and solution" id="{9E4BFD65-67E8-3928-6A14-C332E0FEFA97}">
           <p14:sldIdLst>
+            <p14:sldId id="257"/>
             <p14:sldId id="256"/>
-            <p14:sldId id="257"/>
             <p14:sldId id="258"/>
             <p14:sldId id="266"/>
           </p14:sldIdLst>
@@ -317,7 +317,7 @@
           <a:lstStyle/>
           <a:p>
             <a:r>
-              <a:t>[~10 s] So what if recycling was something you actually looked forward to? That's RECYCL IT: recycling made fun. We're Team Arduino.</a:t>
+              <a:t>[~30 s] Picture this: it's 11 pm, you're holding an empty PET bottle. The trash bin is one meter away, the collection point five minutes away. Most of us pick the bin. Switzerland recycles about 52% of its municipal waste, yet more than a fifth of every trash bag could still be recycled, and each of us produces about 671 kg of waste a year. The bins exist. What's missing is a reason to walk there. Our bet: rewards, challenges and friends can turn recycling into a habit.</a:t>
             </a:r>
           </a:p>
         </p:txBody>
@@ -519,7 +519,7 @@
           <a:lstStyle/>
           <a:p>
             <a:r>
-              <a:t>[~30 s] Picture this: it's 11 pm, you're holding an empty PET bottle. The trash bin is one meter away, the collection point five minutes away. Most of us pick the bin. Switzerland recycles about 52% of its municipal waste, yet more than a fifth of every trash bag could still be recycled, and each of us produces about 671 kg of waste a year. The bins exist. What's missing is a reason to walk there. Our bet: rewards, challenges and friends can turn recycling into a habit.</a:t>
+              <a:t>[~10 s] So what if recycling was something you actually looked forward to? That's RECYCL IT: recycling made fun. We're Team Arduino.</a:t>
             </a:r>
           </a:p>
         </p:txBody>
@@ -1304,7 +1304,7 @@
           </a:prstGeom>
           <a:extLst>
             <a:ext uri="{C572A759-6A51-4108-AA02-DFA0A04FC94B}">
-              <ma14:wrappingTextBoxFlag xmlns="" xmlns:ma14="http://schemas.microsoft.com/office/mac/drawingml/2011/main" val="0"/>
+              <ma14:wrappingTextBoxFlag xmlns:ma14="http://schemas.microsoft.com/office/mac/drawingml/2011/main" xmlns="" val="0"/>
             </a:ext>
           </a:extLst>
         </p:spPr>
@@ -1323,7 +1323,7 @@
             <a:pPr algn="r"/>
             <a:fld id="{F7021451-1387-4CA6-816F-3879F97B5CBC}" type="slidenum">
               <a:rPr lang="en-US" b="0"/>
-              <a:t>‹Nr.›</a:t>
+              <a:t>‹#›</a:t>
             </a:fld>
             <a:endParaRPr lang="en-US"/>
           </a:p>
@@ -1418,7 +1418,7 @@
           </a:prstGeom>
           <a:extLst>
             <a:ext uri="{C572A759-6A51-4108-AA02-DFA0A04FC94B}">
-              <ma14:wrappingTextBoxFlag xmlns="" xmlns:ma14="http://schemas.microsoft.com/office/mac/drawingml/2011/main" val="0"/>
+              <ma14:wrappingTextBoxFlag xmlns:ma14="http://schemas.microsoft.com/office/mac/drawingml/2011/main" xmlns="" val="0"/>
             </a:ext>
           </a:extLst>
         </p:spPr>
@@ -1437,7 +1437,7 @@
             <a:pPr algn="r"/>
             <a:fld id="{F7021451-1387-4CA6-816F-3879F97B5CBC}" type="slidenum">
               <a:rPr lang="en-US" b="0"/>
-              <a:t>‹Nr.›</a:t>
+              <a:t>‹#›</a:t>
             </a:fld>
             <a:endParaRPr lang="en-US"/>
           </a:p>
@@ -1493,7 +1493,7 @@
           </a:prstGeom>
           <a:extLst>
             <a:ext uri="{C572A759-6A51-4108-AA02-DFA0A04FC94B}">
-              <ma14:wrappingTextBoxFlag xmlns="" xmlns:ma14="http://schemas.microsoft.com/office/mac/drawingml/2011/main" val="0"/>
+              <ma14:wrappingTextBoxFlag xmlns:ma14="http://schemas.microsoft.com/office/mac/drawingml/2011/main" xmlns="" val="0"/>
             </a:ext>
           </a:extLst>
         </p:spPr>
@@ -1512,7 +1512,7 @@
             <a:pPr algn="r"/>
             <a:fld id="{F7021451-1387-4CA6-816F-3879F97B5CBC}" type="slidenum">
               <a:rPr lang="en-US" b="0"/>
-              <a:t>‹Nr.›</a:t>
+              <a:t>‹#›</a:t>
             </a:fld>
             <a:endParaRPr lang="en-US"/>
           </a:p>
@@ -1782,7 +1782,7 @@
 
 <file path=ppt/slides/slide1.xml><?xml version="1.0" encoding="utf-8"?>
 <p:sld xmlns:a="http://schemas.openxmlformats.org/drawingml/2006/main" xmlns:r="http://schemas.openxmlformats.org/officeDocument/2006/relationships" xmlns:p="http://schemas.openxmlformats.org/presentationml/2006/main">
-  <p:cSld name="Slide 1">
+  <p:cSld name="Slide 2">
     <p:spTree>
       <p:nvGrpSpPr>
         <p:cNvPr id="1" name=""/>
@@ -1799,20 +1799,60 @@
       </p:grpSpPr>
       <p:sp>
         <p:nvSpPr>
-          <p:cNvPr id="2" name="Badge circle"/>
+          <p:cNvPr id="2" name="Text 1"/>
+          <p:cNvSpPr>
+            <a:spLocks noGrp="1"/>
+          </p:cNvSpPr>
+          <p:nvPr>
+            <p:ph type="title" idx="101" hasCustomPrompt="1"/>
+          </p:nvPr>
+        </p:nvSpPr>
+        <p:spPr>
+          <a:xfrm>
+            <a:off x="548640" y="365760"/>
+            <a:ext cx="11064240" cy="731520"/>
+          </a:xfrm>
+          <a:prstGeom prst="rect">
+            <a:avLst/>
+          </a:prstGeom>
+          <a:noFill/>
+          <a:ln/>
+        </p:spPr>
+        <p:txBody>
+          <a:bodyPr wrap="square" lIns="0" tIns="0" rIns="0" bIns="0" rtlCol="0" anchor="ctr"/>
+          <a:lstStyle/>
+          <a:p>
+            <a:pPr marL="0" indent="0" algn="l">
+              <a:buNone/>
+            </a:pPr>
+            <a:r>
+              <a:rPr lang="en-US" sz="5400" b="1" spc="-100" dirty="0">
+                <a:solidFill>
+                  <a:schemeClr val="tx1"/>
+                </a:solidFill>
+              </a:rPr>
+              <a:t>The Problem</a:t>
+            </a:r>
+            <a:endParaRPr lang="en-US" sz="5400" dirty="0"/>
+          </a:p>
+        </p:txBody>
+      </p:sp>
+      <p:sp>
+        <p:nvSpPr>
+          <p:cNvPr id="3" name="Problem 1 circle"/>
           <p:cNvSpPr/>
           <p:nvPr/>
         </p:nvSpPr>
         <p:spPr>
           <a:xfrm>
-            <a:off x="7955280" y="1280160"/>
-            <a:ext cx="3566160" cy="3566160"/>
+            <a:off x="548640" y="1417320"/>
+            <a:ext cx="685800" cy="685800"/>
           </a:xfrm>
           <a:prstGeom prst="ellipse">
             <a:avLst/>
           </a:prstGeom>
           <a:solidFill>
-            <a:schemeClr val="accent1"/>
+            <a:srgbClr val="F2A33A"/>
           </a:solidFill>
           <a:ln/>
         </p:spPr>
@@ -1824,16 +1864,40 @@
           </a:p>
         </p:txBody>
       </p:sp>
-      <p:sp>
-        <p:nvSpPr>
-          <p:cNvPr id="4" name="Title"/>
+      <p:pic>
+        <p:nvPicPr>
+          <p:cNvPr id="4" name="Problem 1 icon" descr="Problem 1"/>
+          <p:cNvPicPr>
+            <a:picLocks noChangeAspect="1"/>
+          </p:cNvPicPr>
+          <p:nvPr/>
+        </p:nvPicPr>
+        <p:blipFill>
+          <a:blip r:embed="rId3"/>
+          <a:stretch>
+            <a:fillRect/>
+          </a:stretch>
+        </p:blipFill>
+        <p:spPr>
+          <a:xfrm>
+            <a:off x="720090" y="1588770"/>
+            <a:ext cx="342900" cy="342900"/>
+          </a:xfrm>
+          <a:prstGeom prst="rect">
+            <a:avLst/>
+          </a:prstGeom>
+        </p:spPr>
+      </p:pic>
+      <p:sp>
+        <p:nvSpPr>
+          <p:cNvPr id="5" name="Problem text 1"/>
           <p:cNvSpPr txBox="1"/>
           <p:nvPr/>
         </p:nvSpPr>
         <p:spPr>
           <a:xfrm>
-            <a:off x="597235" y="1573823"/>
-            <a:ext cx="7138071" cy="1420837"/>
+            <a:off x="1463040" y="1371600"/>
+            <a:ext cx="5852160" cy="777240"/>
           </a:xfrm>
           <a:prstGeom prst="rect">
             <a:avLst/>
@@ -1849,30 +1913,299 @@
               <a:buNone/>
             </a:pPr>
             <a:r>
-              <a:rPr lang="en-US" spc="-200" sz="9600" b="1" dirty="0">
+              <a:rPr lang="en-US" sz="1800">
+                <a:solidFill>
+                  <a:schemeClr val="tx1"/>
+                </a:solidFill>
+              </a:rPr>
+              <a:t>The trash bin is 1 m away. The collection point is 5 minutes away.</a:t>
+            </a:r>
+          </a:p>
+        </p:txBody>
+      </p:sp>
+      <p:sp>
+        <p:nvSpPr>
+          <p:cNvPr id="6" name="Problem 2 circle"/>
+          <p:cNvSpPr/>
+          <p:nvPr/>
+        </p:nvSpPr>
+        <p:spPr>
+          <a:xfrm>
+            <a:off x="548640" y="2331720"/>
+            <a:ext cx="685800" cy="685800"/>
+          </a:xfrm>
+          <a:prstGeom prst="ellipse">
+            <a:avLst/>
+          </a:prstGeom>
+          <a:solidFill>
+            <a:srgbClr val="F2A33A"/>
+          </a:solidFill>
+          <a:ln/>
+        </p:spPr>
+        <p:txBody>
+          <a:bodyPr/>
+          <a:lstStyle/>
+          <a:p>
+            <a:endParaRPr lang="en-CH"/>
+          </a:p>
+        </p:txBody>
+      </p:sp>
+      <p:pic>
+        <p:nvPicPr>
+          <p:cNvPr id="7" name="Problem 2 icon" descr="Problem 2"/>
+          <p:cNvPicPr>
+            <a:picLocks noChangeAspect="1"/>
+          </p:cNvPicPr>
+          <p:nvPr/>
+        </p:nvPicPr>
+        <p:blipFill>
+          <a:blip r:embed="rId4"/>
+          <a:stretch>
+            <a:fillRect/>
+          </a:stretch>
+        </p:blipFill>
+        <p:spPr>
+          <a:xfrm>
+            <a:off x="720090" y="2503170"/>
+            <a:ext cx="342900" cy="342900"/>
+          </a:xfrm>
+          <a:prstGeom prst="rect">
+            <a:avLst/>
+          </a:prstGeom>
+        </p:spPr>
+      </p:pic>
+      <p:sp>
+        <p:nvSpPr>
+          <p:cNvPr id="8" name="Problem text 2"/>
+          <p:cNvSpPr txBox="1"/>
+          <p:nvPr/>
+        </p:nvSpPr>
+        <p:spPr>
+          <a:xfrm>
+            <a:off x="1463040" y="2286000"/>
+            <a:ext cx="5852160" cy="777240"/>
+          </a:xfrm>
+          <a:prstGeom prst="rect">
+            <a:avLst/>
+          </a:prstGeom>
+          <a:noFill/>
+          <a:ln/>
+        </p:spPr>
+        <p:txBody>
+          <a:bodyPr wrap="square" lIns="0" tIns="0" rIns="0" bIns="0" rtlCol="0" anchor="ctr"/>
+          <a:lstStyle/>
+          <a:p>
+            <a:pPr marL="0" indent="0">
+              <a:buNone/>
+            </a:pPr>
+            <a:r>
+              <a:rPr lang="en-US" sz="1800">
+                <a:solidFill>
+                  <a:schemeClr val="tx1"/>
+                </a:solidFill>
+              </a:rPr>
+              <a:t>Recycling gives you nothing back: no reward, no feedback.</a:t>
+            </a:r>
+          </a:p>
+        </p:txBody>
+      </p:sp>
+      <p:sp>
+        <p:nvSpPr>
+          <p:cNvPr id="9" name="Problem 3 circle"/>
+          <p:cNvSpPr/>
+          <p:nvPr/>
+        </p:nvSpPr>
+        <p:spPr>
+          <a:xfrm>
+            <a:off x="548640" y="3246120"/>
+            <a:ext cx="685800" cy="685800"/>
+          </a:xfrm>
+          <a:prstGeom prst="ellipse">
+            <a:avLst/>
+          </a:prstGeom>
+          <a:solidFill>
+            <a:srgbClr val="F2A33A"/>
+          </a:solidFill>
+          <a:ln/>
+        </p:spPr>
+        <p:txBody>
+          <a:bodyPr/>
+          <a:lstStyle/>
+          <a:p>
+            <a:endParaRPr lang="en-CH"/>
+          </a:p>
+        </p:txBody>
+      </p:sp>
+      <p:pic>
+        <p:nvPicPr>
+          <p:cNvPr id="10" name="Problem 3 icon" descr="Problem 3"/>
+          <p:cNvPicPr>
+            <a:picLocks noChangeAspect="1"/>
+          </p:cNvPicPr>
+          <p:nvPr/>
+        </p:nvPicPr>
+        <p:blipFill>
+          <a:blip r:embed="rId5"/>
+          <a:stretch>
+            <a:fillRect/>
+          </a:stretch>
+        </p:blipFill>
+        <p:spPr>
+          <a:xfrm>
+            <a:off x="720090" y="3417570"/>
+            <a:ext cx="342900" cy="342900"/>
+          </a:xfrm>
+          <a:prstGeom prst="rect">
+            <a:avLst/>
+          </a:prstGeom>
+        </p:spPr>
+      </p:pic>
+      <p:sp>
+        <p:nvSpPr>
+          <p:cNvPr id="11" name="Problem text 3"/>
+          <p:cNvSpPr txBox="1"/>
+          <p:nvPr/>
+        </p:nvSpPr>
+        <p:spPr>
+          <a:xfrm>
+            <a:off x="1463040" y="3200400"/>
+            <a:ext cx="5852160" cy="777240"/>
+          </a:xfrm>
+          <a:prstGeom prst="rect">
+            <a:avLst/>
+          </a:prstGeom>
+          <a:noFill/>
+          <a:ln/>
+        </p:spPr>
+        <p:txBody>
+          <a:bodyPr wrap="square" lIns="0" tIns="0" rIns="0" bIns="0" rtlCol="0" anchor="ctr"/>
+          <a:lstStyle/>
+          <a:p>
+            <a:pPr marL="0" indent="0">
+              <a:buNone/>
+            </a:pPr>
+            <a:r>
+              <a:rPr lang="en-US" sz="1800">
+                <a:solidFill>
+                  <a:schemeClr val="tx1"/>
+                </a:solidFill>
+              </a:rPr>
+              <a:t>Young people know it matters, but the habit doesn't stick.</a:t>
+            </a:r>
+          </a:p>
+        </p:txBody>
+      </p:sp>
+      <p:sp>
+        <p:nvSpPr>
+          <p:cNvPr id="12" name="Hypothesis card"/>
+          <p:cNvSpPr/>
+          <p:nvPr/>
+        </p:nvSpPr>
+        <p:spPr>
+          <a:xfrm>
+            <a:off x="548640" y="4297680"/>
+            <a:ext cx="6766560" cy="1417320"/>
+          </a:xfrm>
+          <a:prstGeom prst="roundRect">
+            <a:avLst>
+              <a:gd name="adj" fmla="val 9677"/>
+            </a:avLst>
+          </a:prstGeom>
+          <a:solidFill>
+            <a:srgbClr val="14342B"/>
+          </a:solidFill>
+          <a:ln/>
+        </p:spPr>
+        <p:txBody>
+          <a:bodyPr/>
+          <a:lstStyle/>
+          <a:p>
+            <a:endParaRPr lang="en-CH"/>
+          </a:p>
+        </p:txBody>
+      </p:sp>
+      <p:sp>
+        <p:nvSpPr>
+          <p:cNvPr id="13" name="Hypothesis"/>
+          <p:cNvSpPr txBox="1"/>
+          <p:nvPr/>
+        </p:nvSpPr>
+        <p:spPr>
+          <a:xfrm>
+            <a:off x="822960" y="4389120"/>
+            <a:ext cx="6217920" cy="1234440"/>
+          </a:xfrm>
+          <a:prstGeom prst="rect">
+            <a:avLst/>
+          </a:prstGeom>
+          <a:noFill/>
+          <a:ln/>
+        </p:spPr>
+        <p:txBody>
+          <a:bodyPr wrap="square" lIns="0" tIns="0" rIns="0" bIns="0" rtlCol="0" anchor="ctr"/>
+          <a:lstStyle/>
+          <a:p>
+            <a:pPr marL="0" indent="0">
+              <a:buNone/>
+            </a:pPr>
+            <a:r>
+              <a:rPr lang="en-US" sz="2100" b="1">
+                <a:solidFill>
+                  <a:schemeClr val="accent1"/>
+                </a:solidFill>
+              </a:rPr>
+              <a:t>Our bet: </a:t>
+            </a:r>
+            <a:r>
+              <a:rPr lang="en-US" sz="2100">
                 <a:solidFill>
                   <a:schemeClr val="bg1"/>
                 </a:solidFill>
-                <a:latin typeface="+mj-lt"/>
-              </a:rPr>
-              <a:t>RECYCL IT!</a:t>
-            </a:r>
-            <a:endParaRPr lang="en-US" sz="9600" dirty="0">
-              <a:latin typeface="+mj-lt"/>
-            </a:endParaRPr>
-          </a:p>
-        </p:txBody>
-      </p:sp>
-      <p:sp>
-        <p:nvSpPr>
-          <p:cNvPr id="5" name="Tagline"/>
+              </a:rPr>
+              <a:t>rewards, challenges and friends turn recycling into a habit.</a:t>
+            </a:r>
+          </a:p>
+        </p:txBody>
+      </p:sp>
+      <p:sp>
+        <p:nvSpPr>
+          <p:cNvPr id="14" name="Stats card"/>
+          <p:cNvSpPr/>
+          <p:nvPr/>
+        </p:nvSpPr>
+        <p:spPr>
+          <a:xfrm>
+            <a:off x="7772400" y="1417320"/>
+            <a:ext cx="3840480" cy="4297680"/>
+          </a:xfrm>
+          <a:prstGeom prst="roundRect">
+            <a:avLst>
+              <a:gd name="adj" fmla="val 3571"/>
+            </a:avLst>
+          </a:prstGeom>
+          <a:solidFill>
+            <a:srgbClr val="EEF4EE"/>
+          </a:solidFill>
+          <a:ln/>
+        </p:spPr>
+        <p:txBody>
+          <a:bodyPr/>
+          <a:lstStyle/>
+          <a:p>
+            <a:endParaRPr lang="en-CH"/>
+          </a:p>
+        </p:txBody>
+      </p:sp>
+      <p:sp>
+        <p:nvSpPr>
+          <p:cNvPr id="15" name="Stat 1"/>
           <p:cNvSpPr txBox="1"/>
           <p:nvPr/>
         </p:nvSpPr>
         <p:spPr>
           <a:xfrm>
-            <a:off x="670560" y="2995538"/>
-            <a:ext cx="6450037" cy="228600"/>
+            <a:off x="8092440" y="1645920"/>
+            <a:ext cx="3291840" cy="685800"/>
           </a:xfrm>
           <a:prstGeom prst="rect">
             <a:avLst/>
@@ -1884,97 +2217,234 @@
           <a:bodyPr wrap="square" lIns="0" tIns="0" rIns="0" bIns="0" rtlCol="0" anchor="ctr"/>
           <a:lstStyle/>
           <a:p>
+            <a:pPr marL="0" indent="0" algn="ctr">
+              <a:buNone/>
+            </a:pPr>
+            <a:r>
+              <a:rPr lang="en-US" sz="4800" b="1" spc="-100" dirty="0">
+                <a:solidFill>
+                  <a:schemeClr val="tx2"/>
+                </a:solidFill>
+              </a:rPr>
+              <a:t>52%</a:t>
+            </a:r>
+            <a:endParaRPr lang="en-US" sz="4800" dirty="0"/>
+          </a:p>
+        </p:txBody>
+      </p:sp>
+      <p:sp>
+        <p:nvSpPr>
+          <p:cNvPr id="16" name="Stat label 1"/>
+          <p:cNvSpPr txBox="1"/>
+          <p:nvPr/>
+        </p:nvSpPr>
+        <p:spPr>
+          <a:xfrm>
+            <a:off x="8092440" y="2304288"/>
+            <a:ext cx="3291840" cy="457200"/>
+          </a:xfrm>
+          <a:prstGeom prst="rect">
+            <a:avLst/>
+          </a:prstGeom>
+          <a:noFill/>
+          <a:ln/>
+        </p:spPr>
+        <p:txBody>
+          <a:bodyPr wrap="square" lIns="0" tIns="0" rIns="0" bIns="0" rtlCol="0" anchor="ctr"/>
+          <a:lstStyle/>
+          <a:p>
+            <a:pPr marL="0" indent="0" algn="ctr">
+              <a:buNone/>
+            </a:pPr>
+            <a:r>
+              <a:rPr lang="en-US" sz="1200" dirty="0">
+                <a:solidFill>
+                  <a:schemeClr val="accent5"/>
+                </a:solidFill>
+              </a:rPr>
+              <a:t>of Swiss municipal waste is recycled (2024)</a:t>
+            </a:r>
+            <a:endParaRPr lang="en-US" sz="1200" dirty="0"/>
+          </a:p>
+        </p:txBody>
+      </p:sp>
+      <p:sp>
+        <p:nvSpPr>
+          <p:cNvPr id="17" name="Stat 2"/>
+          <p:cNvSpPr txBox="1"/>
+          <p:nvPr/>
+        </p:nvSpPr>
+        <p:spPr>
+          <a:xfrm>
+            <a:off x="8092440" y="2990088"/>
+            <a:ext cx="3291840" cy="685800"/>
+          </a:xfrm>
+          <a:prstGeom prst="rect">
+            <a:avLst/>
+          </a:prstGeom>
+          <a:noFill/>
+          <a:ln/>
+        </p:spPr>
+        <p:txBody>
+          <a:bodyPr wrap="square" lIns="0" tIns="0" rIns="0" bIns="0" rtlCol="0" anchor="ctr"/>
+          <a:lstStyle/>
+          <a:p>
+            <a:pPr marL="0" indent="0" algn="ctr">
+              <a:buNone/>
+            </a:pPr>
+            <a:r>
+              <a:rPr lang="en-US" sz="4800" b="1" spc="-100" dirty="0">
+                <a:solidFill>
+                  <a:schemeClr val="tx2"/>
+                </a:solidFill>
+              </a:rPr>
+              <a:t>20%+</a:t>
+            </a:r>
+            <a:endParaRPr lang="en-US" sz="4800" dirty="0"/>
+          </a:p>
+        </p:txBody>
+      </p:sp>
+      <p:sp>
+        <p:nvSpPr>
+          <p:cNvPr id="18" name="Stat label 2"/>
+          <p:cNvSpPr txBox="1"/>
+          <p:nvPr/>
+        </p:nvSpPr>
+        <p:spPr>
+          <a:xfrm>
+            <a:off x="8092440" y="3648456"/>
+            <a:ext cx="3291840" cy="457200"/>
+          </a:xfrm>
+          <a:prstGeom prst="rect">
+            <a:avLst/>
+          </a:prstGeom>
+          <a:noFill/>
+          <a:ln/>
+        </p:spPr>
+        <p:txBody>
+          <a:bodyPr wrap="square" lIns="0" tIns="0" rIns="0" bIns="0" rtlCol="0" anchor="ctr"/>
+          <a:lstStyle/>
+          <a:p>
+            <a:pPr marL="0" indent="0" algn="ctr">
+              <a:buNone/>
+            </a:pPr>
+            <a:r>
+              <a:rPr lang="en-US" sz="1200" dirty="0">
+                <a:solidFill>
+                  <a:schemeClr val="accent5"/>
+                </a:solidFill>
+              </a:rPr>
+              <a:t>of each trash bag could still be recycled</a:t>
+            </a:r>
+            <a:endParaRPr lang="en-US" sz="1200" dirty="0"/>
+          </a:p>
+        </p:txBody>
+      </p:sp>
+      <p:sp>
+        <p:nvSpPr>
+          <p:cNvPr id="19" name="Stat 3"/>
+          <p:cNvSpPr txBox="1"/>
+          <p:nvPr/>
+        </p:nvSpPr>
+        <p:spPr>
+          <a:xfrm>
+            <a:off x="8092440" y="4334256"/>
+            <a:ext cx="3291840" cy="685800"/>
+          </a:xfrm>
+          <a:prstGeom prst="rect">
+            <a:avLst/>
+          </a:prstGeom>
+          <a:noFill/>
+          <a:ln/>
+        </p:spPr>
+        <p:txBody>
+          <a:bodyPr wrap="square" lIns="0" tIns="0" rIns="0" bIns="0" rtlCol="0" anchor="ctr"/>
+          <a:lstStyle/>
+          <a:p>
+            <a:pPr marL="0" indent="0" algn="ctr">
+              <a:buNone/>
+            </a:pPr>
+            <a:r>
+              <a:rPr lang="en-US" sz="4800" b="1" spc="-100" dirty="0">
+                <a:solidFill>
+                  <a:schemeClr val="tx2"/>
+                </a:solidFill>
+              </a:rPr>
+              <a:t>671 kg</a:t>
+            </a:r>
+            <a:endParaRPr lang="en-US" sz="4800" dirty="0"/>
+          </a:p>
+        </p:txBody>
+      </p:sp>
+      <p:sp>
+        <p:nvSpPr>
+          <p:cNvPr id="20" name="Stat label 3"/>
+          <p:cNvSpPr txBox="1"/>
+          <p:nvPr/>
+        </p:nvSpPr>
+        <p:spPr>
+          <a:xfrm>
+            <a:off x="8092440" y="4992624"/>
+            <a:ext cx="3291840" cy="457200"/>
+          </a:xfrm>
+          <a:prstGeom prst="rect">
+            <a:avLst/>
+          </a:prstGeom>
+          <a:noFill/>
+          <a:ln/>
+        </p:spPr>
+        <p:txBody>
+          <a:bodyPr wrap="square" lIns="0" tIns="0" rIns="0" bIns="0" rtlCol="0" anchor="ctr"/>
+          <a:lstStyle/>
+          <a:p>
+            <a:pPr marL="0" indent="0" algn="ctr">
+              <a:buNone/>
+            </a:pPr>
+            <a:r>
+              <a:rPr lang="en-US" sz="1200" dirty="0">
+                <a:solidFill>
+                  <a:schemeClr val="accent5"/>
+                </a:solidFill>
+              </a:rPr>
+              <a:t>municipal waste per person per year (2022)</a:t>
+            </a:r>
+            <a:endParaRPr lang="en-US" sz="1200" dirty="0"/>
+          </a:p>
+        </p:txBody>
+      </p:sp>
+      <p:sp>
+        <p:nvSpPr>
+          <p:cNvPr id="21" name="Source"/>
+          <p:cNvSpPr txBox="1"/>
+          <p:nvPr/>
+        </p:nvSpPr>
+        <p:spPr>
+          <a:xfrm>
+            <a:off x="548640" y="5989320"/>
+            <a:ext cx="11064240" cy="274320"/>
+          </a:xfrm>
+          <a:prstGeom prst="rect">
+            <a:avLst/>
+          </a:prstGeom>
+          <a:noFill/>
+          <a:ln/>
+        </p:spPr>
+        <p:txBody>
+          <a:bodyPr wrap="square" lIns="0" tIns="0" rIns="0" bIns="0" rtlCol="0" anchor="ctr"/>
+          <a:lstStyle/>
+          <a:p>
             <a:pPr marL="0" indent="0">
               <a:buNone/>
             </a:pPr>
             <a:r>
-              <a:rPr lang="en-US" sz="3000" b="1" dirty="0">
-                <a:solidFill>
-                  <a:schemeClr val="accent1"/>
-                </a:solidFill>
-              </a:rPr>
-              <a:t>Recycling made fun.</a:t>
-            </a:r>
-            <a:endParaRPr lang="en-US" sz="3000" dirty="0"/>
-          </a:p>
-        </p:txBody>
-      </p:sp>
-      <p:sp>
-        <p:nvSpPr>
-          <p:cNvPr id="6" name="Subtitle"/>
-          <p:cNvSpPr txBox="1"/>
-          <p:nvPr/>
-        </p:nvSpPr>
-        <p:spPr>
-          <a:xfrm>
-            <a:off x="670560" y="3838723"/>
-            <a:ext cx="6949440" cy="548640"/>
-          </a:xfrm>
-          <a:prstGeom prst="rect">
-            <a:avLst/>
-          </a:prstGeom>
-          <a:noFill/>
-          <a:ln/>
-        </p:spPr>
-        <p:txBody>
-          <a:bodyPr wrap="square" lIns="0" tIns="0" rIns="0" bIns="0" rtlCol="0" anchor="ctr"/>
-          <a:lstStyle/>
-          <a:p>
-            <a:pPr marL="0" indent="0">
-              <a:buNone/>
-            </a:pPr>
-            <a:r>
-              <a:rPr lang="en-US" sz="2200" dirty="0">
-                <a:solidFill>
-                  <a:schemeClr val="accent4"/>
-                </a:solidFill>
-              </a:rPr>
-              <a:t>Turn everyday recycling into real-world rewards.</a:t>
-            </a:r>
-            <a:endParaRPr lang="en-US" sz="2200" dirty="0"/>
-          </a:p>
-        </p:txBody>
-      </p:sp>
-      <p:sp>
-        <p:nvSpPr>
-          <p:cNvPr id="7" name="Team line"/>
-          <p:cNvSpPr txBox="1"/>
-          <p:nvPr/>
-        </p:nvSpPr>
-        <p:spPr>
-          <a:xfrm>
-            <a:off x="691550" y="4387363"/>
-            <a:ext cx="6949440" cy="365760"/>
-          </a:xfrm>
-          <a:prstGeom prst="rect">
-            <a:avLst/>
-          </a:prstGeom>
-          <a:noFill/>
-          <a:ln/>
-        </p:spPr>
-        <p:txBody>
-          <a:bodyPr wrap="square" lIns="0" tIns="0" rIns="0" bIns="0" rtlCol="0" anchor="ctr"/>
-          <a:lstStyle/>
-          <a:p>
-            <a:pPr marL="0" indent="0">
-              <a:buNone/>
-            </a:pPr>
-            <a:r>
-              <a:rPr lang="de-CH" sz="1400" dirty="0">
-                <a:solidFill>
-                  <a:schemeClr val="accent4"/>
-                </a:solidFill>
-              </a:rPr>
-              <a:t>Team </a:t>
-            </a:r>
-            <a:r>
-              <a:rPr lang="en-CH" sz="1400" dirty="0">
-                <a:solidFill>
-                  <a:schemeClr val="accent4"/>
-                </a:solidFill>
-              </a:rPr>
-              <a:t>Arduino · SDG 11: Sustainable Cities and Communities</a:t>
-            </a:r>
+              <a:rPr lang="en-US" sz="1000" dirty="0">
+                <a:solidFill>
+                  <a:schemeClr val="accent5"/>
+                </a:solidFill>
+              </a:rPr>
+              <a:t>Sources: Federal Office for the Environment (FOEN) via Keystone-SDA / blue News; swissinfo.ch</a:t>
+            </a:r>
+            <a:endParaRPr lang="en-US" sz="1000" dirty="0"/>
           </a:p>
         </p:txBody>
       </p:sp>
@@ -1998,7 +2468,7 @@
           </a:prstGeom>
           <a:extLst>
             <a:ext uri="{C572A759-6A51-4108-AA02-DFA0A04FC94B}">
-              <ma14:wrappingTextBoxFlag xmlns="" xmlns:ma14="http://schemas.microsoft.com/office/mac/drawingml/2011/main" val="0"/>
+              <ma14:wrappingTextBoxFlag xmlns:ma14="http://schemas.microsoft.com/office/mac/drawingml/2011/main" xmlns="" val="0"/>
             </a:ext>
           </a:extLst>
         </p:spPr>
@@ -2008,7 +2478,7 @@
             <a:lvl1pPr>
               <a:defRPr sz="1000">
                 <a:solidFill>
-                  <a:schemeClr val="accent4"/>
+                  <a:schemeClr val="accent5"/>
                 </a:solidFill>
               </a:defRPr>
             </a:lvl1pPr>
@@ -2020,71 +2490,6 @@
               <a:t>1</a:t>
             </a:fld>
             <a:endParaRPr lang="en-US"/>
-          </a:p>
-        </p:txBody>
-      </p:sp>
-      <p:pic>
-        <p:nvPicPr>
-          <p:cNvPr id="11" name="Picture 10" descr="Made Fun&#10;&#10;AI-generated content may be incorrect.">
-            <a:extLst>
-              <a:ext uri="{FF2B5EF4-FFF2-40B4-BE49-F238E27FC236}">
-                <a16:creationId xmlns:a16="http://schemas.microsoft.com/office/drawing/2014/main" id="{F17BDBE0-BF24-B823-F4AE-F628CBA590A0}"/>
-              </a:ext>
-            </a:extLst>
-          </p:cNvPr>
-          <p:cNvPicPr>
-            <a:picLocks noChangeAspect="1"/>
-          </p:cNvPicPr>
-          <p:nvPr/>
-        </p:nvPicPr>
-        <p:blipFill>
-          <a:blip r:embed="rId3"/>
-          <a:stretch>
-            <a:fillRect/>
-          </a:stretch>
-        </p:blipFill>
-        <p:spPr>
-          <a:xfrm>
-            <a:off x="7808631" y="1058461"/>
-            <a:ext cx="3931920" cy="3931920"/>
-          </a:xfrm>
-          <a:prstGeom prst="rect">
-            <a:avLst/>
-          </a:prstGeom>
-        </p:spPr>
-      </p:pic>
-      <p:sp>
-        <p:nvSpPr>
-          <p:cNvPr id="90" name="Eyebrow"/>
-          <p:cNvSpPr txBox="1"/>
-          <p:nvPr/>
-        </p:nvSpPr>
-        <p:spPr>
-          <a:xfrm>
-            <a:off x="667512" y="1234440"/>
-            <a:ext cx="7141464" cy="365760"/>
-          </a:xfrm>
-          <a:prstGeom prst="rect">
-            <a:avLst/>
-          </a:prstGeom>
-          <a:noFill/>
-          <a:ln/>
-        </p:spPr>
-        <p:txBody>
-          <a:bodyPr wrap="square" lIns="0" tIns="0" rIns="0" bIns="0" rtlCol="0" anchor="ctr"/>
-          <a:lstStyle/>
-          <a:p>
-            <a:pPr marL="0" indent="0" algn="l">
-              <a:buNone/>
-            </a:pPr>
-            <a:r>
-              <a:rPr lang="en-US" sz="1600" b="1" kern="0" spc="400" dirty="0">
-                <a:solidFill>
-                  <a:schemeClr val="accent1"/>
-                </a:solidFill>
-              </a:rPr>
-              <a:t>INTRODUCING</a:t>
-            </a:r>
           </a:p>
         </p:txBody>
       </p:sp>
@@ -2142,7 +2547,7 @@
               <a:buNone/>
             </a:pPr>
             <a:r>
-              <a:rPr lang="en-US" spc="-100" sz="5400" b="1" dirty="0">
+              <a:rPr lang="en-US" sz="5400" b="1" spc="-100" dirty="0">
                 <a:solidFill>
                   <a:schemeClr val="tx1"/>
                 </a:solidFill>
@@ -2928,7 +3333,7 @@
           </a:prstGeom>
           <a:extLst>
             <a:ext uri="{C572A759-6A51-4108-AA02-DFA0A04FC94B}">
-              <ma14:wrappingTextBoxFlag xmlns="" xmlns:ma14="http://schemas.microsoft.com/office/mac/drawingml/2011/main" val="0"/>
+              <ma14:wrappingTextBoxFlag xmlns:ma14="http://schemas.microsoft.com/office/mac/drawingml/2011/main" xmlns="" val="0"/>
             </a:ext>
           </a:extLst>
         </p:spPr>
@@ -2963,7 +3368,7 @@
 
 <file path=ppt/slides/slide2.xml><?xml version="1.0" encoding="utf-8"?>
 <p:sld xmlns:a="http://schemas.openxmlformats.org/drawingml/2006/main" xmlns:r="http://schemas.openxmlformats.org/officeDocument/2006/relationships" xmlns:p="http://schemas.openxmlformats.org/presentationml/2006/main">
-  <p:cSld name="Slide 2">
+  <p:cSld name="Slide 1">
     <p:spTree>
       <p:nvGrpSpPr>
         <p:cNvPr id="1" name=""/>
@@ -2980,74 +3385,239 @@
       </p:grpSpPr>
       <p:sp>
         <p:nvSpPr>
-          <p:cNvPr id="2" name="Text 1"/>
+          <p:cNvPr id="2" name="Badge circle"/>
+          <p:cNvSpPr/>
+          <p:nvPr/>
+        </p:nvSpPr>
+        <p:spPr>
+          <a:xfrm>
+            <a:off x="7955280" y="1280160"/>
+            <a:ext cx="3566160" cy="3566160"/>
+          </a:xfrm>
+          <a:prstGeom prst="ellipse">
+            <a:avLst/>
+          </a:prstGeom>
+          <a:solidFill>
+            <a:schemeClr val="accent1"/>
+          </a:solidFill>
+          <a:ln/>
+        </p:spPr>
+        <p:txBody>
+          <a:bodyPr/>
+          <a:lstStyle/>
+          <a:p>
+            <a:endParaRPr lang="en-CH"/>
+          </a:p>
+        </p:txBody>
+      </p:sp>
+      <p:sp>
+        <p:nvSpPr>
+          <p:cNvPr id="4" name="Title"/>
+          <p:cNvSpPr txBox="1"/>
+          <p:nvPr/>
+        </p:nvSpPr>
+        <p:spPr>
+          <a:xfrm>
+            <a:off x="597235" y="1573823"/>
+            <a:ext cx="7138071" cy="1420837"/>
+          </a:xfrm>
+          <a:prstGeom prst="rect">
+            <a:avLst/>
+          </a:prstGeom>
+          <a:noFill/>
+          <a:ln/>
+        </p:spPr>
+        <p:txBody>
+          <a:bodyPr wrap="square" lIns="0" tIns="0" rIns="0" bIns="0" rtlCol="0" anchor="ctr"/>
+          <a:lstStyle/>
+          <a:p>
+            <a:pPr marL="0" indent="0">
+              <a:buNone/>
+            </a:pPr>
+            <a:r>
+              <a:rPr lang="en-US" sz="9600" b="1" spc="-200" dirty="0">
+                <a:solidFill>
+                  <a:schemeClr val="bg1"/>
+                </a:solidFill>
+                <a:latin typeface="+mj-lt"/>
+              </a:rPr>
+              <a:t>RECYCL IT!</a:t>
+            </a:r>
+            <a:endParaRPr lang="en-US" sz="9600" dirty="0">
+              <a:latin typeface="+mj-lt"/>
+            </a:endParaRPr>
+          </a:p>
+        </p:txBody>
+      </p:sp>
+      <p:sp>
+        <p:nvSpPr>
+          <p:cNvPr id="5" name="Tagline"/>
+          <p:cNvSpPr txBox="1"/>
+          <p:nvPr/>
+        </p:nvSpPr>
+        <p:spPr>
+          <a:xfrm>
+            <a:off x="670560" y="2995538"/>
+            <a:ext cx="6450037" cy="228600"/>
+          </a:xfrm>
+          <a:prstGeom prst="rect">
+            <a:avLst/>
+          </a:prstGeom>
+          <a:noFill/>
+          <a:ln/>
+        </p:spPr>
+        <p:txBody>
+          <a:bodyPr wrap="square" lIns="0" tIns="0" rIns="0" bIns="0" rtlCol="0" anchor="ctr"/>
+          <a:lstStyle/>
+          <a:p>
+            <a:pPr marL="0" indent="0">
+              <a:buNone/>
+            </a:pPr>
+            <a:r>
+              <a:rPr lang="en-US" sz="3000" b="1" dirty="0">
+                <a:solidFill>
+                  <a:schemeClr val="accent1"/>
+                </a:solidFill>
+              </a:rPr>
+              <a:t>Recycling made fun.</a:t>
+            </a:r>
+            <a:endParaRPr lang="en-US" sz="3000" dirty="0"/>
+          </a:p>
+        </p:txBody>
+      </p:sp>
+      <p:sp>
+        <p:nvSpPr>
+          <p:cNvPr id="6" name="Subtitle"/>
+          <p:cNvSpPr txBox="1"/>
+          <p:nvPr/>
+        </p:nvSpPr>
+        <p:spPr>
+          <a:xfrm>
+            <a:off x="670560" y="3838723"/>
+            <a:ext cx="6949440" cy="548640"/>
+          </a:xfrm>
+          <a:prstGeom prst="rect">
+            <a:avLst/>
+          </a:prstGeom>
+          <a:noFill/>
+          <a:ln/>
+        </p:spPr>
+        <p:txBody>
+          <a:bodyPr wrap="square" lIns="0" tIns="0" rIns="0" bIns="0" rtlCol="0" anchor="ctr"/>
+          <a:lstStyle/>
+          <a:p>
+            <a:pPr marL="0" indent="0">
+              <a:buNone/>
+            </a:pPr>
+            <a:r>
+              <a:rPr lang="en-US" sz="2200" dirty="0">
+                <a:solidFill>
+                  <a:schemeClr val="accent4"/>
+                </a:solidFill>
+              </a:rPr>
+              <a:t>Turn everyday recycling into real-world rewards.</a:t>
+            </a:r>
+            <a:endParaRPr lang="en-US" sz="2200" dirty="0"/>
+          </a:p>
+        </p:txBody>
+      </p:sp>
+      <p:sp>
+        <p:nvSpPr>
+          <p:cNvPr id="7" name="Team line"/>
+          <p:cNvSpPr txBox="1"/>
+          <p:nvPr/>
+        </p:nvSpPr>
+        <p:spPr>
+          <a:xfrm>
+            <a:off x="691550" y="4387363"/>
+            <a:ext cx="6949440" cy="365760"/>
+          </a:xfrm>
+          <a:prstGeom prst="rect">
+            <a:avLst/>
+          </a:prstGeom>
+          <a:noFill/>
+          <a:ln/>
+        </p:spPr>
+        <p:txBody>
+          <a:bodyPr wrap="square" lIns="0" tIns="0" rIns="0" bIns="0" rtlCol="0" anchor="ctr"/>
+          <a:lstStyle/>
+          <a:p>
+            <a:pPr marL="0" indent="0">
+              <a:buNone/>
+            </a:pPr>
+            <a:r>
+              <a:rPr lang="de-CH" sz="1400" dirty="0">
+                <a:solidFill>
+                  <a:schemeClr val="accent4"/>
+                </a:solidFill>
+              </a:rPr>
+              <a:t>Team </a:t>
+            </a:r>
+            <a:r>
+              <a:rPr lang="en-CH" sz="1400" dirty="0">
+                <a:solidFill>
+                  <a:schemeClr val="accent4"/>
+                </a:solidFill>
+              </a:rPr>
+              <a:t>Arduino · SDG 11: Sustainable Cities and Communities</a:t>
+            </a:r>
+          </a:p>
+        </p:txBody>
+      </p:sp>
+      <p:sp>
+        <p:nvSpPr>
+          <p:cNvPr id="25" name="Slide Number Placeholder 0"/>
           <p:cNvSpPr>
             <a:spLocks noGrp="1"/>
           </p:cNvSpPr>
           <p:nvPr>
-            <p:ph type="title" idx="101" hasCustomPrompt="1"/>
+            <p:ph type="sldNum" sz="quarter" idx="4294967295"/>
           </p:nvPr>
         </p:nvSpPr>
         <p:spPr>
           <a:xfrm>
-            <a:off x="548640" y="365760"/>
-            <a:ext cx="11064240" cy="731520"/>
-          </a:xfrm>
-          <a:prstGeom prst="rect">
-            <a:avLst/>
-          </a:prstGeom>
-          <a:noFill/>
-          <a:ln/>
-        </p:spPr>
-        <p:txBody>
-          <a:bodyPr wrap="square" lIns="0" tIns="0" rIns="0" bIns="0" rtlCol="0" anchor="ctr"/>
-          <a:lstStyle/>
-          <a:p>
-            <a:pPr marL="0" indent="0" algn="l">
-              <a:buNone/>
-            </a:pPr>
-            <a:r>
-              <a:rPr lang="en-US" spc="-100" sz="5400" b="1" dirty="0">
-                <a:solidFill>
-                  <a:schemeClr val="tx1"/>
-                </a:solidFill>
-              </a:rPr>
-              <a:t>The Problem</a:t>
-            </a:r>
-            <a:endParaRPr lang="en-US" sz="5400" dirty="0"/>
-          </a:p>
-        </p:txBody>
-      </p:sp>
-      <p:sp>
-        <p:nvSpPr>
-          <p:cNvPr id="3" name="Problem 1 circle"/>
-          <p:cNvSpPr/>
-          <p:nvPr/>
-        </p:nvSpPr>
-        <p:spPr>
-          <a:xfrm>
-            <a:off x="548640" y="1417320"/>
-            <a:ext cx="685800" cy="685800"/>
-          </a:xfrm>
-          <a:prstGeom prst="ellipse">
-            <a:avLst/>
-          </a:prstGeom>
-          <a:solidFill>
-            <a:srgbClr val="F2A33A"/>
-          </a:solidFill>
-          <a:ln/>
+            <a:off x="11155680" y="6400800"/>
+            <a:ext cx="457200" cy="274320"/>
+          </a:xfrm>
+          <a:prstGeom prst="rect">
+            <a:avLst/>
+          </a:prstGeom>
+          <a:extLst>
+            <a:ext uri="{C572A759-6A51-4108-AA02-DFA0A04FC94B}">
+              <ma14:wrappingTextBoxFlag xmlns:ma14="http://schemas.microsoft.com/office/mac/drawingml/2011/main" xmlns="" val="0"/>
+            </a:ext>
+          </a:extLst>
         </p:spPr>
         <p:txBody>
           <a:bodyPr/>
-          <a:lstStyle/>
-          <a:p>
-            <a:endParaRPr lang="en-CH"/>
+          <a:lstStyle>
+            <a:lvl1pPr>
+              <a:defRPr sz="1000">
+                <a:solidFill>
+                  <a:schemeClr val="accent4"/>
+                </a:solidFill>
+              </a:defRPr>
+            </a:lvl1pPr>
+          </a:lstStyle>
+          <a:p>
+            <a:pPr algn="r"/>
+            <a:fld id="{F7021451-1387-4CA6-816F-3879F97B5CBC}" type="slidenum">
+              <a:rPr lang="en-US" b="0"/>
+              <a:t>2</a:t>
+            </a:fld>
+            <a:endParaRPr lang="en-US"/>
           </a:p>
         </p:txBody>
       </p:sp>
       <p:pic>
         <p:nvPicPr>
-          <p:cNvPr id="4" name="Problem 1 icon" descr="Problem 1"/>
+          <p:cNvPr id="11" name="Picture 10" descr="Made Fun&#10;&#10;AI-generated content may be incorrect.">
+            <a:extLst>
+              <a:ext uri="{FF2B5EF4-FFF2-40B4-BE49-F238E27FC236}">
+                <a16:creationId xmlns:a16="http://schemas.microsoft.com/office/drawing/2014/main" id="{F17BDBE0-BF24-B823-F4AE-F628CBA590A0}"/>
+              </a:ext>
+            </a:extLst>
+          </p:cNvPr>
           <p:cNvPicPr>
             <a:picLocks noChangeAspect="1"/>
           </p:cNvPicPr>
@@ -3061,8 +3631,8 @@
         </p:blipFill>
         <p:spPr>
           <a:xfrm>
-            <a:off x="720090" y="1588770"/>
-            <a:ext cx="342900" cy="342900"/>
+            <a:off x="7808631" y="1058461"/>
+            <a:ext cx="3931920" cy="3931920"/>
           </a:xfrm>
           <a:prstGeom prst="rect">
             <a:avLst/>
@@ -3071,14 +3641,14 @@
       </p:pic>
       <p:sp>
         <p:nvSpPr>
-          <p:cNvPr id="5" name="Problem text 1"/>
+          <p:cNvPr id="90" name="Eyebrow"/>
           <p:cNvSpPr txBox="1"/>
           <p:nvPr/>
         </p:nvSpPr>
         <p:spPr>
           <a:xfrm>
-            <a:off x="1463040" y="1371600"/>
-            <a:ext cx="5852160" cy="777240"/>
+            <a:off x="667512" y="1234440"/>
+            <a:ext cx="7141464" cy="365760"/>
           </a:xfrm>
           <a:prstGeom prst="rect">
             <a:avLst/>
@@ -3090,587 +3660,17 @@
           <a:bodyPr wrap="square" lIns="0" tIns="0" rIns="0" bIns="0" rtlCol="0" anchor="ctr"/>
           <a:lstStyle/>
           <a:p>
-            <a:pPr marL="0" indent="0">
-              <a:buNone/>
-            </a:pPr>
-            <a:r>
-              <a:rPr lang="en-US" sz="1800">
-                <a:solidFill>
-                  <a:schemeClr val="tx1"/>
-                </a:solidFill>
-              </a:rPr>
-              <a:t>The trash bin is 1 m away. The collection point is 5 minutes away.</a:t>
-            </a:r>
-          </a:p>
-        </p:txBody>
-      </p:sp>
-      <p:sp>
-        <p:nvSpPr>
-          <p:cNvPr id="6" name="Problem 2 circle"/>
-          <p:cNvSpPr/>
-          <p:nvPr/>
-        </p:nvSpPr>
-        <p:spPr>
-          <a:xfrm>
-            <a:off x="548640" y="2331720"/>
-            <a:ext cx="685800" cy="685800"/>
-          </a:xfrm>
-          <a:prstGeom prst="ellipse">
-            <a:avLst/>
-          </a:prstGeom>
-          <a:solidFill>
-            <a:srgbClr val="F2A33A"/>
-          </a:solidFill>
-          <a:ln/>
-        </p:spPr>
-        <p:txBody>
-          <a:bodyPr/>
-          <a:lstStyle/>
-          <a:p>
-            <a:endParaRPr lang="en-CH"/>
-          </a:p>
-        </p:txBody>
-      </p:sp>
-      <p:pic>
-        <p:nvPicPr>
-          <p:cNvPr id="7" name="Problem 2 icon" descr="Problem 2"/>
-          <p:cNvPicPr>
-            <a:picLocks noChangeAspect="1"/>
-          </p:cNvPicPr>
-          <p:nvPr/>
-        </p:nvPicPr>
-        <p:blipFill>
-          <a:blip r:embed="rId4"/>
-          <a:stretch>
-            <a:fillRect/>
-          </a:stretch>
-        </p:blipFill>
-        <p:spPr>
-          <a:xfrm>
-            <a:off x="720090" y="2503170"/>
-            <a:ext cx="342900" cy="342900"/>
-          </a:xfrm>
-          <a:prstGeom prst="rect">
-            <a:avLst/>
-          </a:prstGeom>
-        </p:spPr>
-      </p:pic>
-      <p:sp>
-        <p:nvSpPr>
-          <p:cNvPr id="8" name="Problem text 2"/>
-          <p:cNvSpPr txBox="1"/>
-          <p:nvPr/>
-        </p:nvSpPr>
-        <p:spPr>
-          <a:xfrm>
-            <a:off x="1463040" y="2286000"/>
-            <a:ext cx="5852160" cy="777240"/>
-          </a:xfrm>
-          <a:prstGeom prst="rect">
-            <a:avLst/>
-          </a:prstGeom>
-          <a:noFill/>
-          <a:ln/>
-        </p:spPr>
-        <p:txBody>
-          <a:bodyPr wrap="square" lIns="0" tIns="0" rIns="0" bIns="0" rtlCol="0" anchor="ctr"/>
-          <a:lstStyle/>
-          <a:p>
-            <a:pPr marL="0" indent="0">
-              <a:buNone/>
-            </a:pPr>
-            <a:r>
-              <a:rPr lang="en-US" sz="1800">
-                <a:solidFill>
-                  <a:schemeClr val="tx1"/>
-                </a:solidFill>
-              </a:rPr>
-              <a:t>Recycling gives you nothing back: no reward, no feedback.</a:t>
-            </a:r>
-          </a:p>
-        </p:txBody>
-      </p:sp>
-      <p:sp>
-        <p:nvSpPr>
-          <p:cNvPr id="9" name="Problem 3 circle"/>
-          <p:cNvSpPr/>
-          <p:nvPr/>
-        </p:nvSpPr>
-        <p:spPr>
-          <a:xfrm>
-            <a:off x="548640" y="3246120"/>
-            <a:ext cx="685800" cy="685800"/>
-          </a:xfrm>
-          <a:prstGeom prst="ellipse">
-            <a:avLst/>
-          </a:prstGeom>
-          <a:solidFill>
-            <a:srgbClr val="F2A33A"/>
-          </a:solidFill>
-          <a:ln/>
-        </p:spPr>
-        <p:txBody>
-          <a:bodyPr/>
-          <a:lstStyle/>
-          <a:p>
-            <a:endParaRPr lang="en-CH"/>
-          </a:p>
-        </p:txBody>
-      </p:sp>
-      <p:pic>
-        <p:nvPicPr>
-          <p:cNvPr id="10" name="Problem 3 icon" descr="Problem 3"/>
-          <p:cNvPicPr>
-            <a:picLocks noChangeAspect="1"/>
-          </p:cNvPicPr>
-          <p:nvPr/>
-        </p:nvPicPr>
-        <p:blipFill>
-          <a:blip r:embed="rId5"/>
-          <a:stretch>
-            <a:fillRect/>
-          </a:stretch>
-        </p:blipFill>
-        <p:spPr>
-          <a:xfrm>
-            <a:off x="720090" y="3417570"/>
-            <a:ext cx="342900" cy="342900"/>
-          </a:xfrm>
-          <a:prstGeom prst="rect">
-            <a:avLst/>
-          </a:prstGeom>
-        </p:spPr>
-      </p:pic>
-      <p:sp>
-        <p:nvSpPr>
-          <p:cNvPr id="11" name="Problem text 3"/>
-          <p:cNvSpPr txBox="1"/>
-          <p:nvPr/>
-        </p:nvSpPr>
-        <p:spPr>
-          <a:xfrm>
-            <a:off x="1463040" y="3200400"/>
-            <a:ext cx="5852160" cy="777240"/>
-          </a:xfrm>
-          <a:prstGeom prst="rect">
-            <a:avLst/>
-          </a:prstGeom>
-          <a:noFill/>
-          <a:ln/>
-        </p:spPr>
-        <p:txBody>
-          <a:bodyPr wrap="square" lIns="0" tIns="0" rIns="0" bIns="0" rtlCol="0" anchor="ctr"/>
-          <a:lstStyle/>
-          <a:p>
-            <a:pPr marL="0" indent="0">
-              <a:buNone/>
-            </a:pPr>
-            <a:r>
-              <a:rPr lang="en-US" sz="1800">
-                <a:solidFill>
-                  <a:schemeClr val="tx1"/>
-                </a:solidFill>
-              </a:rPr>
-              <a:t>Young people know it matters, but the habit doesn't stick.</a:t>
-            </a:r>
-          </a:p>
-        </p:txBody>
-      </p:sp>
-      <p:sp>
-        <p:nvSpPr>
-          <p:cNvPr id="12" name="Hypothesis card"/>
-          <p:cNvSpPr/>
-          <p:nvPr/>
-        </p:nvSpPr>
-        <p:spPr>
-          <a:xfrm>
-            <a:off x="548640" y="4297680"/>
-            <a:ext cx="6766560" cy="1417320"/>
-          </a:xfrm>
-          <a:prstGeom prst="roundRect">
-            <a:avLst>
-              <a:gd name="adj" fmla="val 9677"/>
-            </a:avLst>
-          </a:prstGeom>
-          <a:solidFill>
-            <a:srgbClr val="14342B"/>
-          </a:solidFill>
-          <a:ln/>
-        </p:spPr>
-        <p:txBody>
-          <a:bodyPr/>
-          <a:lstStyle/>
-          <a:p>
-            <a:endParaRPr lang="en-CH"/>
-          </a:p>
-        </p:txBody>
-      </p:sp>
-      <p:sp>
-        <p:nvSpPr>
-          <p:cNvPr id="13" name="Hypothesis"/>
-          <p:cNvSpPr txBox="1"/>
-          <p:nvPr/>
-        </p:nvSpPr>
-        <p:spPr>
-          <a:xfrm>
-            <a:off x="822960" y="4389120"/>
-            <a:ext cx="6217920" cy="1234440"/>
-          </a:xfrm>
-          <a:prstGeom prst="rect">
-            <a:avLst/>
-          </a:prstGeom>
-          <a:noFill/>
-          <a:ln/>
-        </p:spPr>
-        <p:txBody>
-          <a:bodyPr wrap="square" lIns="0" tIns="0" rIns="0" bIns="0" rtlCol="0" anchor="ctr"/>
-          <a:lstStyle/>
-          <a:p>
-            <a:pPr marL="0" indent="0">
-              <a:buNone/>
-            </a:pPr>
-            <a:r>
-              <a:rPr lang="en-US" sz="2100" b="1">
+            <a:pPr marL="0" indent="0" algn="l">
+              <a:buNone/>
+            </a:pPr>
+            <a:r>
+              <a:rPr lang="en-US" sz="1600" b="1" kern="0" spc="400" dirty="0">
                 <a:solidFill>
                   <a:schemeClr val="accent1"/>
                 </a:solidFill>
               </a:rPr>
-              <a:t>Our bet: </a:t>
-            </a:r>
-            <a:r>
-              <a:rPr lang="en-US" sz="2100">
-                <a:solidFill>
-                  <a:schemeClr val="bg1"/>
-                </a:solidFill>
-              </a:rPr>
-              <a:t>rewards, challenges and friends turn recycling into a habit.</a:t>
-            </a:r>
-          </a:p>
-        </p:txBody>
-      </p:sp>
-      <p:sp>
-        <p:nvSpPr>
-          <p:cNvPr id="14" name="Stats card"/>
-          <p:cNvSpPr/>
-          <p:nvPr/>
-        </p:nvSpPr>
-        <p:spPr>
-          <a:xfrm>
-            <a:off x="7772400" y="1417320"/>
-            <a:ext cx="3840480" cy="4297680"/>
-          </a:xfrm>
-          <a:prstGeom prst="roundRect">
-            <a:avLst>
-              <a:gd name="adj" fmla="val 3571"/>
-            </a:avLst>
-          </a:prstGeom>
-          <a:solidFill>
-            <a:srgbClr val="EEF4EE"/>
-          </a:solidFill>
-          <a:ln/>
-        </p:spPr>
-        <p:txBody>
-          <a:bodyPr/>
-          <a:lstStyle/>
-          <a:p>
-            <a:endParaRPr lang="en-CH"/>
-          </a:p>
-        </p:txBody>
-      </p:sp>
-      <p:sp>
-        <p:nvSpPr>
-          <p:cNvPr id="15" name="Stat 1"/>
-          <p:cNvSpPr txBox="1"/>
-          <p:nvPr/>
-        </p:nvSpPr>
-        <p:spPr>
-          <a:xfrm>
-            <a:off x="8092440" y="1645920"/>
-            <a:ext cx="3291840" cy="685800"/>
-          </a:xfrm>
-          <a:prstGeom prst="rect">
-            <a:avLst/>
-          </a:prstGeom>
-          <a:noFill/>
-          <a:ln/>
-        </p:spPr>
-        <p:txBody>
-          <a:bodyPr wrap="square" lIns="0" tIns="0" rIns="0" bIns="0" rtlCol="0" anchor="ctr"/>
-          <a:lstStyle/>
-          <a:p>
-            <a:pPr marL="0" indent="0" algn="ctr">
-              <a:buNone/>
-            </a:pPr>
-            <a:r>
-              <a:rPr lang="en-US" spc="-100" sz="4800" b="1" dirty="0">
-                <a:solidFill>
-                  <a:schemeClr val="tx2"/>
-                </a:solidFill>
-              </a:rPr>
-              <a:t>52%</a:t>
-            </a:r>
-            <a:endParaRPr lang="en-US" sz="4800" dirty="0"/>
-          </a:p>
-        </p:txBody>
-      </p:sp>
-      <p:sp>
-        <p:nvSpPr>
-          <p:cNvPr id="16" name="Stat label 1"/>
-          <p:cNvSpPr txBox="1"/>
-          <p:nvPr/>
-        </p:nvSpPr>
-        <p:spPr>
-          <a:xfrm>
-            <a:off x="8092440" y="2304288"/>
-            <a:ext cx="3291840" cy="457200"/>
-          </a:xfrm>
-          <a:prstGeom prst="rect">
-            <a:avLst/>
-          </a:prstGeom>
-          <a:noFill/>
-          <a:ln/>
-        </p:spPr>
-        <p:txBody>
-          <a:bodyPr wrap="square" lIns="0" tIns="0" rIns="0" bIns="0" rtlCol="0" anchor="ctr"/>
-          <a:lstStyle/>
-          <a:p>
-            <a:pPr marL="0" indent="0" algn="ctr">
-              <a:buNone/>
-            </a:pPr>
-            <a:r>
-              <a:rPr lang="en-US" sz="1200" dirty="0">
-                <a:solidFill>
-                  <a:schemeClr val="accent5"/>
-                </a:solidFill>
-              </a:rPr>
-              <a:t>of Swiss municipal waste is recycled (2024)</a:t>
-            </a:r>
-            <a:endParaRPr lang="en-US" sz="1200" dirty="0"/>
-          </a:p>
-        </p:txBody>
-      </p:sp>
-      <p:sp>
-        <p:nvSpPr>
-          <p:cNvPr id="17" name="Stat 2"/>
-          <p:cNvSpPr txBox="1"/>
-          <p:nvPr/>
-        </p:nvSpPr>
-        <p:spPr>
-          <a:xfrm>
-            <a:off x="8092440" y="2990088"/>
-            <a:ext cx="3291840" cy="685800"/>
-          </a:xfrm>
-          <a:prstGeom prst="rect">
-            <a:avLst/>
-          </a:prstGeom>
-          <a:noFill/>
-          <a:ln/>
-        </p:spPr>
-        <p:txBody>
-          <a:bodyPr wrap="square" lIns="0" tIns="0" rIns="0" bIns="0" rtlCol="0" anchor="ctr"/>
-          <a:lstStyle/>
-          <a:p>
-            <a:pPr marL="0" indent="0" algn="ctr">
-              <a:buNone/>
-            </a:pPr>
-            <a:r>
-              <a:rPr lang="en-US" spc="-100" sz="4800" b="1" dirty="0">
-                <a:solidFill>
-                  <a:schemeClr val="tx2"/>
-                </a:solidFill>
-              </a:rPr>
-              <a:t>20%+</a:t>
-            </a:r>
-            <a:endParaRPr lang="en-US" sz="4800" dirty="0"/>
-          </a:p>
-        </p:txBody>
-      </p:sp>
-      <p:sp>
-        <p:nvSpPr>
-          <p:cNvPr id="18" name="Stat label 2"/>
-          <p:cNvSpPr txBox="1"/>
-          <p:nvPr/>
-        </p:nvSpPr>
-        <p:spPr>
-          <a:xfrm>
-            <a:off x="8092440" y="3648456"/>
-            <a:ext cx="3291840" cy="457200"/>
-          </a:xfrm>
-          <a:prstGeom prst="rect">
-            <a:avLst/>
-          </a:prstGeom>
-          <a:noFill/>
-          <a:ln/>
-        </p:spPr>
-        <p:txBody>
-          <a:bodyPr wrap="square" lIns="0" tIns="0" rIns="0" bIns="0" rtlCol="0" anchor="ctr"/>
-          <a:lstStyle/>
-          <a:p>
-            <a:pPr marL="0" indent="0" algn="ctr">
-              <a:buNone/>
-            </a:pPr>
-            <a:r>
-              <a:rPr lang="en-US" sz="1200" dirty="0">
-                <a:solidFill>
-                  <a:schemeClr val="accent5"/>
-                </a:solidFill>
-              </a:rPr>
-              <a:t>of each trash bag could still be recycled</a:t>
-            </a:r>
-            <a:endParaRPr lang="en-US" sz="1200" dirty="0"/>
-          </a:p>
-        </p:txBody>
-      </p:sp>
-      <p:sp>
-        <p:nvSpPr>
-          <p:cNvPr id="19" name="Stat 3"/>
-          <p:cNvSpPr txBox="1"/>
-          <p:nvPr/>
-        </p:nvSpPr>
-        <p:spPr>
-          <a:xfrm>
-            <a:off x="8092440" y="4334256"/>
-            <a:ext cx="3291840" cy="685800"/>
-          </a:xfrm>
-          <a:prstGeom prst="rect">
-            <a:avLst/>
-          </a:prstGeom>
-          <a:noFill/>
-          <a:ln/>
-        </p:spPr>
-        <p:txBody>
-          <a:bodyPr wrap="square" lIns="0" tIns="0" rIns="0" bIns="0" rtlCol="0" anchor="ctr"/>
-          <a:lstStyle/>
-          <a:p>
-            <a:pPr marL="0" indent="0" algn="ctr">
-              <a:buNone/>
-            </a:pPr>
-            <a:r>
-              <a:rPr lang="en-US" spc="-100" sz="4800" b="1" dirty="0">
-                <a:solidFill>
-                  <a:schemeClr val="tx2"/>
-                </a:solidFill>
-              </a:rPr>
-              <a:t>671 kg</a:t>
-            </a:r>
-            <a:endParaRPr lang="en-US" sz="4800" dirty="0"/>
-          </a:p>
-        </p:txBody>
-      </p:sp>
-      <p:sp>
-        <p:nvSpPr>
-          <p:cNvPr id="20" name="Stat label 3"/>
-          <p:cNvSpPr txBox="1"/>
-          <p:nvPr/>
-        </p:nvSpPr>
-        <p:spPr>
-          <a:xfrm>
-            <a:off x="8092440" y="4992624"/>
-            <a:ext cx="3291840" cy="457200"/>
-          </a:xfrm>
-          <a:prstGeom prst="rect">
-            <a:avLst/>
-          </a:prstGeom>
-          <a:noFill/>
-          <a:ln/>
-        </p:spPr>
-        <p:txBody>
-          <a:bodyPr wrap="square" lIns="0" tIns="0" rIns="0" bIns="0" rtlCol="0" anchor="ctr"/>
-          <a:lstStyle/>
-          <a:p>
-            <a:pPr marL="0" indent="0" algn="ctr">
-              <a:buNone/>
-            </a:pPr>
-            <a:r>
-              <a:rPr lang="en-US" sz="1200" dirty="0">
-                <a:solidFill>
-                  <a:schemeClr val="accent5"/>
-                </a:solidFill>
-              </a:rPr>
-              <a:t>municipal waste per person per year (2022)</a:t>
-            </a:r>
-            <a:endParaRPr lang="en-US" sz="1200" dirty="0"/>
-          </a:p>
-        </p:txBody>
-      </p:sp>
-      <p:sp>
-        <p:nvSpPr>
-          <p:cNvPr id="21" name="Source"/>
-          <p:cNvSpPr txBox="1"/>
-          <p:nvPr/>
-        </p:nvSpPr>
-        <p:spPr>
-          <a:xfrm>
-            <a:off x="548640" y="5989320"/>
-            <a:ext cx="11064240" cy="274320"/>
-          </a:xfrm>
-          <a:prstGeom prst="rect">
-            <a:avLst/>
-          </a:prstGeom>
-          <a:noFill/>
-          <a:ln/>
-        </p:spPr>
-        <p:txBody>
-          <a:bodyPr wrap="square" lIns="0" tIns="0" rIns="0" bIns="0" rtlCol="0" anchor="ctr"/>
-          <a:lstStyle/>
-          <a:p>
-            <a:pPr marL="0" indent="0">
-              <a:buNone/>
-            </a:pPr>
-            <a:r>
-              <a:rPr lang="en-US" sz="1000" dirty="0">
-                <a:solidFill>
-                  <a:schemeClr val="accent5"/>
-                </a:solidFill>
-              </a:rPr>
-              <a:t>Sources: Federal Office for the Environment (FOEN) via Keystone-SDA / blue News; swissinfo.ch</a:t>
-            </a:r>
-            <a:endParaRPr lang="en-US" sz="1000" dirty="0"/>
-          </a:p>
-        </p:txBody>
-      </p:sp>
-      <p:sp>
-        <p:nvSpPr>
-          <p:cNvPr id="25" name="Slide Number Placeholder 0"/>
-          <p:cNvSpPr>
-            <a:spLocks noGrp="1"/>
-          </p:cNvSpPr>
-          <p:nvPr>
-            <p:ph type="sldNum" sz="quarter" idx="4294967295"/>
-          </p:nvPr>
-        </p:nvSpPr>
-        <p:spPr>
-          <a:xfrm>
-            <a:off x="11155680" y="6400800"/>
-            <a:ext cx="457200" cy="274320"/>
-          </a:xfrm>
-          <a:prstGeom prst="rect">
-            <a:avLst/>
-          </a:prstGeom>
-          <a:extLst>
-            <a:ext uri="{C572A759-6A51-4108-AA02-DFA0A04FC94B}">
-              <ma14:wrappingTextBoxFlag xmlns="" xmlns:ma14="http://schemas.microsoft.com/office/mac/drawingml/2011/main" val="0"/>
-            </a:ext>
-          </a:extLst>
-        </p:spPr>
-        <p:txBody>
-          <a:bodyPr/>
-          <a:lstStyle>
-            <a:lvl1pPr>
-              <a:defRPr sz="1000">
-                <a:solidFill>
-                  <a:schemeClr val="accent5"/>
-                </a:solidFill>
-              </a:defRPr>
-            </a:lvl1pPr>
-          </a:lstStyle>
-          <a:p>
-            <a:pPr algn="r"/>
-            <a:fld id="{F7021451-1387-4CA6-816F-3879F97B5CBC}" type="slidenum">
-              <a:rPr lang="en-US" b="0"/>
-              <a:t>2</a:t>
-            </a:fld>
-            <a:endParaRPr lang="en-US"/>
+              <a:t>INTRODUCING</a:t>
+            </a:r>
           </a:p>
         </p:txBody>
       </p:sp>
@@ -3728,7 +3728,7 @@
               <a:buNone/>
             </a:pPr>
             <a:r>
-              <a:rPr lang="en-US" spc="-100" sz="5400" b="1" dirty="0">
+              <a:rPr lang="en-US" sz="5400" b="1" spc="-100" dirty="0">
                 <a:solidFill>
                   <a:schemeClr val="tx1"/>
                 </a:solidFill>
@@ -3879,7 +3879,7 @@
               <a:buNone/>
             </a:pPr>
             <a:r>
-              <a:rPr lang="en-US" spc="-50" sz="3600" b="1" dirty="0">
+              <a:rPr lang="en-US" sz="3600" b="1" spc="-50" dirty="0">
                 <a:solidFill>
                   <a:schemeClr val="accent1"/>
                 </a:solidFill>
@@ -4030,7 +4030,7 @@
               <a:buNone/>
             </a:pPr>
             <a:r>
-              <a:rPr lang="en-US" spc="-50" sz="3600" b="1" dirty="0">
+              <a:rPr lang="en-US" sz="3600" b="1" spc="-50" dirty="0">
                 <a:solidFill>
                   <a:schemeClr val="accent1"/>
                 </a:solidFill>
@@ -4181,7 +4181,7 @@
               <a:buNone/>
             </a:pPr>
             <a:r>
-              <a:rPr lang="en-US" spc="-50" sz="3600" b="1" dirty="0">
+              <a:rPr lang="en-US" sz="3600" b="1" spc="-50" dirty="0">
                 <a:solidFill>
                   <a:schemeClr val="accent1"/>
                 </a:solidFill>
@@ -4332,7 +4332,7 @@
               <a:buNone/>
             </a:pPr>
             <a:r>
-              <a:rPr lang="en-US" spc="-50" sz="3600" b="1" dirty="0">
+              <a:rPr lang="en-US" sz="3600" b="1" spc="-50" dirty="0">
                 <a:solidFill>
                   <a:schemeClr val="accent1"/>
                 </a:solidFill>
@@ -4483,7 +4483,7 @@
               <a:buNone/>
             </a:pPr>
             <a:r>
-              <a:rPr lang="en-US" spc="-50" sz="3600" b="1" dirty="0">
+              <a:rPr lang="en-US" sz="3600" b="1" spc="-50" dirty="0">
                 <a:solidFill>
                   <a:schemeClr val="accent1"/>
                 </a:solidFill>
@@ -4637,7 +4637,7 @@
           </a:prstGeom>
           <a:extLst>
             <a:ext uri="{C572A759-6A51-4108-AA02-DFA0A04FC94B}">
-              <ma14:wrappingTextBoxFlag xmlns="" xmlns:ma14="http://schemas.microsoft.com/office/mac/drawingml/2011/main" val="0"/>
+              <ma14:wrappingTextBoxFlag xmlns:ma14="http://schemas.microsoft.com/office/mac/drawingml/2011/main" xmlns="" val="0"/>
             </a:ext>
           </a:extLst>
         </p:spPr>
@@ -4716,7 +4716,7 @@
               <a:buNone/>
             </a:pPr>
             <a:r>
-              <a:rPr lang="en-US" spc="-100" sz="5400" b="1" dirty="0">
+              <a:rPr lang="en-US" sz="5400" b="1" spc="-100" dirty="0">
                 <a:solidFill>
                   <a:schemeClr val="tx1"/>
                 </a:solidFill>
@@ -4817,11 +4817,6 @@
               </a:rPr>
               <a:t> (our first target customer): CHF 0.80 per resident a year ≈ CHF 9’000</a:t>
             </a:r>
-            <a:endParaRPr lang="en-US" sz="1800" dirty="0">
-              <a:solidFill>
-                <a:schemeClr val="tx1"/>
-              </a:solidFill>
-            </a:endParaRPr>
           </a:p>
         </p:txBody>
       </p:sp>
@@ -5139,7 +5134,7 @@
               <a:buNone/>
             </a:pPr>
             <a:r>
-              <a:rPr lang="en-US" spc="-50" sz="3600" b="1" dirty="0">
+              <a:rPr lang="en-US" sz="3600" b="1" spc="-50" dirty="0">
                 <a:solidFill>
                   <a:schemeClr val="tx2"/>
                 </a:solidFill>
@@ -5209,7 +5204,7 @@
               <a:buNone/>
             </a:pPr>
             <a:r>
-              <a:rPr lang="en-US" spc="-50" sz="3600" b="1" dirty="0">
+              <a:rPr lang="en-US" sz="3600" b="1" spc="-50" dirty="0">
                 <a:solidFill>
                   <a:schemeClr val="tx2"/>
                 </a:solidFill>
@@ -5279,7 +5274,7 @@
               <a:buNone/>
             </a:pPr>
             <a:r>
-              <a:rPr lang="en-US" spc="-50" sz="3600" b="1" dirty="0">
+              <a:rPr lang="en-US" sz="3600" b="1" spc="-50" dirty="0">
                 <a:solidFill>
                   <a:schemeClr val="tx2"/>
                 </a:solidFill>
@@ -5379,7 +5374,7 @@
           </a:prstGeom>
           <a:extLst>
             <a:ext uri="{C572A759-6A51-4108-AA02-DFA0A04FC94B}">
-              <ma14:wrappingTextBoxFlag xmlns="" xmlns:ma14="http://schemas.microsoft.com/office/mac/drawingml/2011/main" val="0"/>
+              <ma14:wrappingTextBoxFlag xmlns:ma14="http://schemas.microsoft.com/office/mac/drawingml/2011/main" xmlns="" val="0"/>
             </a:ext>
           </a:extLst>
         </p:spPr>
@@ -5458,7 +5453,7 @@
               <a:buNone/>
             </a:pPr>
             <a:r>
-              <a:rPr lang="en-US" spc="-100" sz="5400" b="1" dirty="0">
+              <a:rPr lang="en-US" sz="5400" b="1" spc="-100" dirty="0">
                 <a:solidFill>
                   <a:schemeClr val="tx1"/>
                 </a:solidFill>
@@ -5674,7 +5669,7 @@
           </a:prstGeom>
           <a:extLst>
             <a:ext uri="{C572A759-6A51-4108-AA02-DFA0A04FC94B}">
-              <ma14:wrappingTextBoxFlag xmlns="" xmlns:ma14="http://schemas.microsoft.com/office/mac/drawingml/2011/main" val="0"/>
+              <ma14:wrappingTextBoxFlag xmlns:ma14="http://schemas.microsoft.com/office/mac/drawingml/2011/main" xmlns="" val="0"/>
             </a:ext>
           </a:extLst>
         </p:spPr>
@@ -6434,7 +6429,7 @@
               <a:buNone/>
             </a:pPr>
             <a:r>
-              <a:rPr lang="en-US" spc="-100" sz="5400" b="1" dirty="0">
+              <a:rPr lang="en-US" sz="5400" b="1" spc="-100" dirty="0">
                 <a:solidFill>
                   <a:schemeClr val="tx1"/>
                 </a:solidFill>
@@ -7378,7 +7373,7 @@
           </a:prstGeom>
           <a:extLst>
             <a:ext uri="{C572A759-6A51-4108-AA02-DFA0A04FC94B}">
-              <ma14:wrappingTextBoxFlag xmlns="" xmlns:ma14="http://schemas.microsoft.com/office/mac/drawingml/2011/main" val="0"/>
+              <ma14:wrappingTextBoxFlag xmlns:ma14="http://schemas.microsoft.com/office/mac/drawingml/2011/main" xmlns="" val="0"/>
             </a:ext>
           </a:extLst>
         </p:spPr>
@@ -7457,7 +7452,7 @@
               <a:buNone/>
             </a:pPr>
             <a:r>
-              <a:rPr lang="en-US" spc="-100" sz="5400" b="1" dirty="0">
+              <a:rPr lang="en-US" sz="5400" b="1" spc="-100" dirty="0">
                 <a:solidFill>
                   <a:schemeClr val="tx1"/>
                 </a:solidFill>
@@ -8060,7 +8055,7 @@
           </a:prstGeom>
           <a:extLst>
             <a:ext uri="{C572A759-6A51-4108-AA02-DFA0A04FC94B}">
-              <ma14:wrappingTextBoxFlag xmlns="" xmlns:ma14="http://schemas.microsoft.com/office/mac/drawingml/2011/main" val="0"/>
+              <ma14:wrappingTextBoxFlag xmlns:ma14="http://schemas.microsoft.com/office/mac/drawingml/2011/main" xmlns="" val="0"/>
             </a:ext>
           </a:extLst>
         </p:spPr>
@@ -8170,7 +8165,7 @@
               <a:buNone/>
             </a:pPr>
             <a:r>
-              <a:rPr lang="en-US" spc="-50" sz="3600" b="1" dirty="0">
+              <a:rPr lang="en-US" sz="3600" b="1" spc="-50" dirty="0">
                 <a:solidFill>
                   <a:schemeClr val="bg1"/>
                 </a:solidFill>
@@ -8684,25 +8679,34 @@
           <a:bodyPr wrap="square" lIns="0" tIns="0" rIns="0" bIns="0" rtlCol="0" anchor="ctr"/>
           <a:lstStyle/>
           <a:p>
+            <a:r>
+              <a:rPr lang="en-CH" sz="1400" b="1" dirty="0">
+                <a:solidFill>
+                  <a:schemeClr val="bg1"/>
+                </a:solidFill>
+              </a:rPr>
+              <a:t>Use of AI:</a:t>
+            </a:r>
+          </a:p>
+          <a:p>
+            <a:r>
+              <a:rPr lang="en-CH" sz="1400" dirty="0">
+                <a:solidFill>
+                  <a:schemeClr val="bg1"/>
+                </a:solidFill>
+              </a:rPr>
+              <a:t>AI helped us transform our initial paper concept into a fully functional mobile web app within 24 hours. It supported coding, debugging, and technical problem-solving, as well as the refinement of our presentation slides. The core idea, decisions, and overall direction remained our own.</a:t>
+            </a:r>
+          </a:p>
+          <a:p>
             <a:pPr marL="0" indent="0" algn="l">
               <a:buNone/>
             </a:pPr>
-            <a:r>
-              <a:rPr lang="en-US" sz="1800" b="1" dirty="0">
-                <a:solidFill>
-                  <a:schemeClr val="accent1"/>
-                </a:solidFill>
-              </a:rPr>
-              <a:t>Use of AI: </a:t>
-            </a:r>
-            <a:r>
-              <a:rPr lang="en-US" sz="1800" dirty="0">
-                <a:solidFill>
-                  <a:schemeClr val="bg1"/>
-                </a:solidFill>
-              </a:rPr>
-              <a:t>helped turn our paper idea into a working mobile web app, and helped with the slides.</a:t>
-            </a:r>
+            <a:endParaRPr lang="en-US" sz="1800" dirty="0">
+              <a:solidFill>
+                <a:schemeClr val="bg1"/>
+              </a:solidFill>
+            </a:endParaRPr>
           </a:p>
         </p:txBody>
       </p:sp>
@@ -8726,7 +8730,7 @@
           </a:prstGeom>
           <a:extLst>
             <a:ext uri="{C572A759-6A51-4108-AA02-DFA0A04FC94B}">
-              <ma14:wrappingTextBoxFlag xmlns="" xmlns:ma14="http://schemas.microsoft.com/office/mac/drawingml/2011/main" val="0"/>
+              <ma14:wrappingTextBoxFlag xmlns:ma14="http://schemas.microsoft.com/office/mac/drawingml/2011/main" xmlns="" val="0"/>
             </a:ext>
           </a:extLst>
         </p:spPr>
@@ -8842,7 +8846,7 @@
               <a:buNone/>
             </a:pPr>
             <a:r>
-              <a:rPr lang="en-US" spc="-50" sz="3600" b="1" dirty="0">
+              <a:rPr lang="en-US" sz="3600" b="1" spc="-50" dirty="0">
                 <a:solidFill>
                   <a:schemeClr val="bg1"/>
                 </a:solidFill>
@@ -8995,7 +8999,7 @@
           </a:prstGeom>
           <a:extLst>
             <a:ext uri="{C572A759-6A51-4108-AA02-DFA0A04FC94B}">
-              <ma14:wrappingTextBoxFlag xmlns="" xmlns:ma14="http://schemas.microsoft.com/office/mac/drawingml/2011/main" val="0"/>
+              <ma14:wrappingTextBoxFlag xmlns:ma14="http://schemas.microsoft.com/office/mac/drawingml/2011/main" xmlns="" val="0"/>
             </a:ext>
           </a:extLst>
         </p:spPr>
